--- a/01-精益工具知识库/PPT/05-防错与SMED详解.pptx
+++ b/01-精益工具知识库/PPT/05-防错与SMED详解.pptx
@@ -1522,6 +1522,10 @@
             <a:prstDash val="solid"/>
           </a:ln>
         </p:spPr>
+        <p:txBody>
+          <a:bodyPr/>
+          <a:p/>
+        </p:txBody>
       </p:sp>
       <p:sp>
         <p:nvSpPr>
@@ -1547,6 +1551,10 @@
             <a:prstDash val="solid"/>
           </a:ln>
         </p:spPr>
+        <p:txBody>
+          <a:bodyPr/>
+          <a:p/>
+        </p:txBody>
       </p:sp>
       <p:sp>
         <p:nvSpPr>
@@ -1611,6 +1619,10 @@
             <a:prstDash val="solid"/>
           </a:ln>
         </p:spPr>
+        <p:txBody>
+          <a:bodyPr/>
+          <a:p/>
+        </p:txBody>
       </p:sp>
       <p:sp>
         <p:nvSpPr>
@@ -1802,6 +1814,10 @@
             <a:prstDash val="solid"/>
           </a:ln>
         </p:spPr>
+        <p:txBody>
+          <a:bodyPr/>
+          <a:p/>
+        </p:txBody>
       </p:sp>
       <p:sp>
         <p:nvSpPr>
@@ -1827,6 +1843,10 @@
             <a:prstDash val="solid"/>
           </a:ln>
         </p:spPr>
+        <p:txBody>
+          <a:bodyPr/>
+          <a:p/>
+        </p:txBody>
       </p:sp>
       <p:sp>
         <p:nvSpPr>
@@ -1930,6 +1950,10 @@
             <a:prstDash val="solid"/>
           </a:ln>
         </p:spPr>
+        <p:txBody>
+          <a:bodyPr/>
+          <a:p/>
+        </p:txBody>
       </p:sp>
       <p:sp>
         <p:nvSpPr>
@@ -1996,6 +2020,10 @@
             <a:prstDash val="solid"/>
           </a:ln>
         </p:spPr>
+        <p:txBody>
+          <a:bodyPr/>
+          <a:p/>
+        </p:txBody>
       </p:sp>
       <p:sp>
         <p:nvSpPr>
@@ -2060,6 +2088,10 @@
             <a:prstDash val="solid"/>
           </a:ln>
         </p:spPr>
+        <p:txBody>
+          <a:bodyPr/>
+          <a:p/>
+        </p:txBody>
       </p:sp>
       <p:sp>
         <p:nvSpPr>
@@ -2085,6 +2117,10 @@
             <a:prstDash val="solid"/>
           </a:ln>
         </p:spPr>
+        <p:txBody>
+          <a:bodyPr/>
+          <a:p/>
+        </p:txBody>
       </p:sp>
       <p:sp>
         <p:nvSpPr>
@@ -2110,6 +2146,10 @@
             <a:prstDash val="solid"/>
           </a:ln>
         </p:spPr>
+        <p:txBody>
+          <a:bodyPr/>
+          <a:p/>
+        </p:txBody>
       </p:sp>
       <p:sp>
         <p:nvSpPr>
@@ -2420,6 +2460,10 @@
             <a:prstDash val="solid"/>
           </a:ln>
         </p:spPr>
+        <p:txBody>
+          <a:bodyPr/>
+          <a:p/>
+        </p:txBody>
       </p:sp>
       <p:sp>
         <p:nvSpPr>
@@ -2445,6 +2489,10 @@
             <a:prstDash val="solid"/>
           </a:ln>
         </p:spPr>
+        <p:txBody>
+          <a:bodyPr/>
+          <a:p/>
+        </p:txBody>
       </p:sp>
       <p:sp>
         <p:nvSpPr>
@@ -2470,6 +2518,10 @@
             <a:prstDash val="solid"/>
           </a:ln>
         </p:spPr>
+        <p:txBody>
+          <a:bodyPr/>
+          <a:p/>
+        </p:txBody>
       </p:sp>
       <p:sp>
         <p:nvSpPr>
@@ -2646,6 +2698,10 @@
             <a:prstDash val="solid"/>
           </a:ln>
         </p:spPr>
+        <p:txBody>
+          <a:bodyPr/>
+          <a:p/>
+        </p:txBody>
       </p:sp>
       <p:sp>
         <p:nvSpPr>
@@ -2788,6 +2844,10 @@
             <a:prstDash val="solid"/>
           </a:ln>
         </p:spPr>
+        <p:txBody>
+          <a:bodyPr/>
+          <a:p/>
+        </p:txBody>
       </p:sp>
       <p:sp>
         <p:nvSpPr>
@@ -2930,6 +2990,10 @@
             <a:prstDash val="solid"/>
           </a:ln>
         </p:spPr>
+        <p:txBody>
+          <a:bodyPr/>
+          <a:p/>
+        </p:txBody>
       </p:sp>
       <p:sp>
         <p:nvSpPr>
@@ -3072,6 +3136,10 @@
             <a:prstDash val="solid"/>
           </a:ln>
         </p:spPr>
+        <p:txBody>
+          <a:bodyPr/>
+          <a:p/>
+        </p:txBody>
       </p:sp>
       <p:sp>
         <p:nvSpPr>
@@ -3214,6 +3282,10 @@
             <a:prstDash val="solid"/>
           </a:ln>
         </p:spPr>
+        <p:txBody>
+          <a:bodyPr/>
+          <a:p/>
+        </p:txBody>
       </p:sp>
       <p:sp>
         <p:nvSpPr>
@@ -3356,6 +3428,10 @@
             <a:prstDash val="solid"/>
           </a:ln>
         </p:spPr>
+        <p:txBody>
+          <a:bodyPr/>
+          <a:p/>
+        </p:txBody>
       </p:sp>
       <p:sp>
         <p:nvSpPr>
@@ -3498,6 +3574,10 @@
             <a:prstDash val="solid"/>
           </a:ln>
         </p:spPr>
+        <p:txBody>
+          <a:bodyPr/>
+          <a:p/>
+        </p:txBody>
       </p:sp>
       <p:sp>
         <p:nvSpPr>
@@ -3642,6 +3722,10 @@
             <a:prstDash val="solid"/>
           </a:ln>
         </p:spPr>
+        <p:txBody>
+          <a:bodyPr/>
+          <a:p/>
+        </p:txBody>
       </p:sp>
       <p:sp>
         <p:nvSpPr>
@@ -3747,6 +3831,10 @@
             <a:prstDash val="solid"/>
           </a:ln>
         </p:spPr>
+        <p:txBody>
+          <a:bodyPr/>
+          <a:p/>
+        </p:txBody>
       </p:sp>
       <p:sp>
         <p:nvSpPr>
@@ -3850,6 +3938,10 @@
             <a:prstDash val="solid"/>
           </a:ln>
         </p:spPr>
+        <p:txBody>
+          <a:bodyPr/>
+          <a:p/>
+        </p:txBody>
       </p:sp>
     </p:spTree>
   </p:cSld>
@@ -3907,6 +3999,10 @@
             <a:prstDash val="solid"/>
           </a:ln>
         </p:spPr>
+        <p:txBody>
+          <a:bodyPr/>
+          <a:p/>
+        </p:txBody>
       </p:sp>
       <p:sp>
         <p:nvSpPr>
@@ -3932,6 +4028,10 @@
             <a:prstDash val="solid"/>
           </a:ln>
         </p:spPr>
+        <p:txBody>
+          <a:bodyPr/>
+          <a:p/>
+        </p:txBody>
       </p:sp>
       <p:sp>
         <p:nvSpPr>
@@ -4005,7 +4105,7 @@
                 <a:ea typeface="Microsoft YaHei" pitchFamily="34" charset="-122"/>
                 <a:cs typeface="Microsoft YaHei" pitchFamily="34" charset="-120"/>
               </a:rPr>
-              <a:t>Poka-Yoke Devices in Fastener Manufacturing</a:t>
+              <a:t>Poka-Yoke Devices in Discrete Manufacturing</a:t>
             </a:r>
             <a:endParaRPr lang="en-US" sz="1400" dirty="0"/>
           </a:p>
@@ -4035,6 +4135,10 @@
             <a:prstDash val="solid"/>
           </a:ln>
         </p:spPr>
+        <p:txBody>
+          <a:bodyPr/>
+          <a:p/>
+        </p:txBody>
       </p:sp>
       <p:sp>
         <p:nvSpPr>
@@ -4101,6 +4205,10 @@
             <a:prstDash val="solid"/>
           </a:ln>
         </p:spPr>
+        <p:txBody>
+          <a:bodyPr/>
+          <a:p/>
+        </p:txBody>
       </p:sp>
       <p:sp>
         <p:nvSpPr>
@@ -4165,6 +4273,10 @@
             <a:prstDash val="solid"/>
           </a:ln>
         </p:spPr>
+        <p:txBody>
+          <a:bodyPr/>
+          <a:p/>
+        </p:txBody>
       </p:sp>
       <p:sp>
         <p:nvSpPr>
@@ -4190,6 +4302,10 @@
             <a:prstDash val="solid"/>
           </a:ln>
         </p:spPr>
+        <p:txBody>
+          <a:bodyPr/>
+          <a:p/>
+        </p:txBody>
       </p:sp>
       <p:sp>
         <p:nvSpPr>
@@ -4215,6 +4331,10 @@
             <a:prstDash val="solid"/>
           </a:ln>
         </p:spPr>
+        <p:txBody>
+          <a:bodyPr/>
+          <a:p/>
+        </p:txBody>
       </p:sp>
       <p:sp>
         <p:nvSpPr>
@@ -4474,6 +4594,10 @@
             <a:prstDash val="solid"/>
           </a:ln>
         </p:spPr>
+        <p:txBody>
+          <a:bodyPr/>
+          <a:p/>
+        </p:txBody>
       </p:sp>
       <p:sp>
         <p:nvSpPr>
@@ -4499,6 +4623,10 @@
             <a:prstDash val="solid"/>
           </a:ln>
         </p:spPr>
+        <p:txBody>
+          <a:bodyPr/>
+          <a:p/>
+        </p:txBody>
       </p:sp>
       <p:sp>
         <p:nvSpPr>
@@ -4524,6 +4652,10 @@
             <a:prstDash val="solid"/>
           </a:ln>
         </p:spPr>
+        <p:txBody>
+          <a:bodyPr/>
+          <a:p/>
+        </p:txBody>
       </p:sp>
       <p:sp>
         <p:nvSpPr>
@@ -4558,7 +4690,7 @@
                 <a:ea typeface="Microsoft YaHei" pitchFamily="34" charset="-122"/>
                 <a:cs typeface="Microsoft YaHei" pitchFamily="34" charset="-120"/>
               </a:rPr>
-              <a:t>案例2：漏螺纹检测</a:t>
+              <a:t>案例2：漏尺寸检测</a:t>
             </a:r>
             <a:endParaRPr lang="en-US" sz="1200" dirty="0"/>
           </a:p>
@@ -4597,7 +4729,7 @@
                 <a:ea typeface="Microsoft YaHei" pitchFamily="34" charset="-122"/>
                 <a:cs typeface="Microsoft YaHei" pitchFamily="34" charset="-120"/>
               </a:rPr>
-              <a:t>问题：攻牙工序漏攻螺纹流出</a:t>
+              <a:t>问题：精加工工序漏精加工流出</a:t>
             </a:r>
             <a:endParaRPr lang="en-US" sz="1000" dirty="0"/>
           </a:p>
@@ -4636,7 +4768,7 @@
                 <a:ea typeface="Microsoft YaHei" pitchFamily="34" charset="-122"/>
                 <a:cs typeface="Microsoft YaHei" pitchFamily="34" charset="-120"/>
               </a:rPr>
-              <a:t>方案：通止规在线自动检测装置</a:t>
+              <a:t>方案：量规在线自动检测装置</a:t>
             </a:r>
             <a:endParaRPr lang="en-US" sz="1000" dirty="0"/>
           </a:p>
@@ -4783,6 +4915,10 @@
             <a:prstDash val="solid"/>
           </a:ln>
         </p:spPr>
+        <p:txBody>
+          <a:bodyPr/>
+          <a:p/>
+        </p:txBody>
       </p:sp>
       <p:sp>
         <p:nvSpPr>
@@ -4808,6 +4944,10 @@
             <a:prstDash val="solid"/>
           </a:ln>
         </p:spPr>
+        <p:txBody>
+          <a:bodyPr/>
+          <a:p/>
+        </p:txBody>
       </p:sp>
       <p:sp>
         <p:nvSpPr>
@@ -4833,6 +4973,10 @@
             <a:prstDash val="solid"/>
           </a:ln>
         </p:spPr>
+        <p:txBody>
+          <a:bodyPr/>
+          <a:p/>
+        </p:txBody>
       </p:sp>
       <p:sp>
         <p:nvSpPr>
@@ -5092,6 +5236,10 @@
             <a:prstDash val="solid"/>
           </a:ln>
         </p:spPr>
+        <p:txBody>
+          <a:bodyPr/>
+          <a:p/>
+        </p:txBody>
       </p:sp>
       <p:sp>
         <p:nvSpPr>
@@ -5117,6 +5265,10 @@
             <a:prstDash val="solid"/>
           </a:ln>
         </p:spPr>
+        <p:txBody>
+          <a:bodyPr/>
+          <a:p/>
+        </p:txBody>
       </p:sp>
       <p:sp>
         <p:nvSpPr>
@@ -5142,6 +5294,10 @@
             <a:prstDash val="solid"/>
           </a:ln>
         </p:spPr>
+        <p:txBody>
+          <a:bodyPr/>
+          <a:p/>
+        </p:txBody>
       </p:sp>
       <p:sp>
         <p:nvSpPr>
@@ -5215,7 +5371,7 @@
                 <a:ea typeface="Microsoft YaHei" pitchFamily="34" charset="-122"/>
                 <a:cs typeface="Microsoft YaHei" pitchFamily="34" charset="-120"/>
               </a:rPr>
-              <a:t>问题：不同规格螺栓（M8 vs M10）混装出货</a:t>
+              <a:t>问题：不同规格工件（某型号 vs 某型号）混装出货</a:t>
             </a:r>
             <a:endParaRPr lang="en-US" sz="1000" dirty="0"/>
           </a:p>
@@ -5362,6 +5518,10 @@
             <a:prstDash val="solid"/>
           </a:ln>
         </p:spPr>
+        <p:txBody>
+          <a:bodyPr/>
+          <a:p/>
+        </p:txBody>
       </p:sp>
       <p:sp>
         <p:nvSpPr>
@@ -5458,6 +5618,10 @@
             <a:prstDash val="solid"/>
           </a:ln>
         </p:spPr>
+        <p:txBody>
+          <a:bodyPr/>
+          <a:p/>
+        </p:txBody>
       </p:sp>
       <p:sp>
         <p:nvSpPr>
@@ -5483,6 +5647,10 @@
             <a:prstDash val="solid"/>
           </a:ln>
         </p:spPr>
+        <p:txBody>
+          <a:bodyPr/>
+          <a:p/>
+        </p:txBody>
       </p:sp>
       <p:sp>
         <p:nvSpPr>
@@ -5586,6 +5754,10 @@
             <a:prstDash val="solid"/>
           </a:ln>
         </p:spPr>
+        <p:txBody>
+          <a:bodyPr/>
+          <a:p/>
+        </p:txBody>
       </p:sp>
       <p:sp>
         <p:nvSpPr>
@@ -5652,6 +5824,10 @@
             <a:prstDash val="solid"/>
           </a:ln>
         </p:spPr>
+        <p:txBody>
+          <a:bodyPr/>
+          <a:p/>
+        </p:txBody>
       </p:sp>
       <p:sp>
         <p:nvSpPr>
@@ -5716,6 +5892,10 @@
             <a:prstDash val="solid"/>
           </a:ln>
         </p:spPr>
+        <p:txBody>
+          <a:bodyPr/>
+          <a:p/>
+        </p:txBody>
       </p:sp>
       <p:sp>
         <p:nvSpPr>
@@ -5782,6 +5962,10 @@
             <a:prstDash val="solid"/>
           </a:ln>
         </p:spPr>
+        <p:txBody>
+          <a:bodyPr/>
+          <a:p/>
+        </p:txBody>
       </p:sp>
       <p:sp>
         <p:nvSpPr>
@@ -5885,6 +6069,10 @@
             <a:prstDash val="solid"/>
           </a:ln>
         </p:spPr>
+        <p:txBody>
+          <a:bodyPr/>
+          <a:p/>
+        </p:txBody>
       </p:sp>
       <p:sp>
         <p:nvSpPr>
@@ -5910,6 +6098,10 @@
             <a:prstDash val="solid"/>
           </a:ln>
         </p:spPr>
+        <p:txBody>
+          <a:bodyPr/>
+          <a:p/>
+        </p:txBody>
       </p:sp>
       <p:sp>
         <p:nvSpPr>
@@ -5976,6 +6168,10 @@
             <a:prstDash val="solid"/>
           </a:ln>
         </p:spPr>
+        <p:txBody>
+          <a:bodyPr/>
+          <a:p/>
+        </p:txBody>
       </p:sp>
       <p:sp>
         <p:nvSpPr>
@@ -6079,6 +6275,10 @@
             <a:prstDash val="solid"/>
           </a:ln>
         </p:spPr>
+        <p:txBody>
+          <a:bodyPr/>
+          <a:p/>
+        </p:txBody>
       </p:sp>
       <p:sp>
         <p:nvSpPr>
@@ -6104,6 +6304,10 @@
             <a:prstDash val="solid"/>
           </a:ln>
         </p:spPr>
+        <p:txBody>
+          <a:bodyPr/>
+          <a:p/>
+        </p:txBody>
       </p:sp>
       <p:sp>
         <p:nvSpPr>
@@ -6170,6 +6374,10 @@
             <a:prstDash val="solid"/>
           </a:ln>
         </p:spPr>
+        <p:txBody>
+          <a:bodyPr/>
+          <a:p/>
+        </p:txBody>
       </p:sp>
       <p:sp>
         <p:nvSpPr>
@@ -6273,6 +6481,10 @@
             <a:prstDash val="solid"/>
           </a:ln>
         </p:spPr>
+        <p:txBody>
+          <a:bodyPr/>
+          <a:p/>
+        </p:txBody>
       </p:sp>
       <p:sp>
         <p:nvSpPr>
@@ -6298,6 +6510,10 @@
             <a:prstDash val="solid"/>
           </a:ln>
         </p:spPr>
+        <p:txBody>
+          <a:bodyPr/>
+          <a:p/>
+        </p:txBody>
       </p:sp>
       <p:sp>
         <p:nvSpPr>
@@ -6364,6 +6580,10 @@
             <a:prstDash val="solid"/>
           </a:ln>
         </p:spPr>
+        <p:txBody>
+          <a:bodyPr/>
+          <a:p/>
+        </p:txBody>
       </p:sp>
       <p:sp>
         <p:nvSpPr>
@@ -6467,6 +6687,10 @@
             <a:prstDash val="solid"/>
           </a:ln>
         </p:spPr>
+        <p:txBody>
+          <a:bodyPr/>
+          <a:p/>
+        </p:txBody>
       </p:sp>
       <p:sp>
         <p:nvSpPr>
@@ -6492,6 +6716,10 @@
             <a:prstDash val="solid"/>
           </a:ln>
         </p:spPr>
+        <p:txBody>
+          <a:bodyPr/>
+          <a:p/>
+        </p:txBody>
       </p:sp>
       <p:sp>
         <p:nvSpPr>
@@ -6558,6 +6786,10 @@
             <a:prstDash val="solid"/>
           </a:ln>
         </p:spPr>
+        <p:txBody>
+          <a:bodyPr/>
+          <a:p/>
+        </p:txBody>
       </p:sp>
       <p:sp>
         <p:nvSpPr>
@@ -6661,6 +6893,10 @@
             <a:prstDash val="solid"/>
           </a:ln>
         </p:spPr>
+        <p:txBody>
+          <a:bodyPr/>
+          <a:p/>
+        </p:txBody>
       </p:sp>
       <p:sp>
         <p:nvSpPr>
@@ -6686,6 +6922,10 @@
             <a:prstDash val="solid"/>
           </a:ln>
         </p:spPr>
+        <p:txBody>
+          <a:bodyPr/>
+          <a:p/>
+        </p:txBody>
       </p:sp>
       <p:sp>
         <p:nvSpPr>
@@ -6752,6 +6992,10 @@
             <a:prstDash val="solid"/>
           </a:ln>
         </p:spPr>
+        <p:txBody>
+          <a:bodyPr/>
+          <a:p/>
+        </p:txBody>
       </p:sp>
       <p:sp>
         <p:nvSpPr>
@@ -6855,6 +7099,10 @@
             <a:prstDash val="solid"/>
           </a:ln>
         </p:spPr>
+        <p:txBody>
+          <a:bodyPr/>
+          <a:p/>
+        </p:txBody>
       </p:sp>
       <p:sp>
         <p:nvSpPr>
@@ -6880,6 +7128,10 @@
             <a:prstDash val="solid"/>
           </a:ln>
         </p:spPr>
+        <p:txBody>
+          <a:bodyPr/>
+          <a:p/>
+        </p:txBody>
       </p:sp>
       <p:sp>
         <p:nvSpPr>
@@ -6946,6 +7198,10 @@
             <a:prstDash val="solid"/>
           </a:ln>
         </p:spPr>
+        <p:txBody>
+          <a:bodyPr/>
+          <a:p/>
+        </p:txBody>
       </p:sp>
       <p:sp>
         <p:nvSpPr>
@@ -7049,6 +7305,10 @@
             <a:prstDash val="solid"/>
           </a:ln>
         </p:spPr>
+        <p:txBody>
+          <a:bodyPr/>
+          <a:p/>
+        </p:txBody>
       </p:sp>
       <p:sp>
         <p:nvSpPr>
@@ -7113,6 +7373,10 @@
             <a:prstDash val="solid"/>
           </a:ln>
         </p:spPr>
+        <p:txBody>
+          <a:bodyPr/>
+          <a:p/>
+        </p:txBody>
       </p:sp>
       <p:sp>
         <p:nvSpPr>
@@ -7194,6 +7458,10 @@
             <a:prstDash val="solid"/>
           </a:ln>
         </p:spPr>
+        <p:txBody>
+          <a:bodyPr/>
+          <a:p/>
+        </p:txBody>
       </p:sp>
       <p:sp>
         <p:nvSpPr>
@@ -7346,6 +7614,10 @@
             <a:prstDash val="solid"/>
           </a:ln>
         </p:spPr>
+        <p:txBody>
+          <a:bodyPr/>
+          <a:p/>
+        </p:txBody>
       </p:sp>
       <p:sp>
         <p:nvSpPr>
@@ -7371,6 +7643,10 @@
             <a:prstDash val="solid"/>
           </a:ln>
         </p:spPr>
+        <p:txBody>
+          <a:bodyPr/>
+          <a:p/>
+        </p:txBody>
       </p:sp>
       <p:sp>
         <p:nvSpPr>
@@ -7474,6 +7750,10 @@
             <a:prstDash val="solid"/>
           </a:ln>
         </p:spPr>
+        <p:txBody>
+          <a:bodyPr/>
+          <a:p/>
+        </p:txBody>
       </p:sp>
       <p:sp>
         <p:nvSpPr>
@@ -7540,6 +7820,10 @@
             <a:prstDash val="solid"/>
           </a:ln>
         </p:spPr>
+        <p:txBody>
+          <a:bodyPr/>
+          <a:p/>
+        </p:txBody>
       </p:sp>
       <p:sp>
         <p:nvSpPr>
@@ -7606,6 +7890,10 @@
             <a:prstDash val="solid"/>
           </a:ln>
         </p:spPr>
+        <p:txBody>
+          <a:bodyPr/>
+          <a:p/>
+        </p:txBody>
       </p:sp>
       <p:sp>
         <p:nvSpPr>
@@ -7782,6 +8070,10 @@
             <a:prstDash val="solid"/>
           </a:ln>
         </p:spPr>
+        <p:txBody>
+          <a:bodyPr/>
+          <a:p/>
+        </p:txBody>
       </p:sp>
       <p:sp>
         <p:nvSpPr>
@@ -7809,6 +8101,10 @@
             <a:prstDash val="solid"/>
           </a:ln>
         </p:spPr>
+        <p:txBody>
+          <a:bodyPr/>
+          <a:p/>
+        </p:txBody>
       </p:sp>
       <p:sp>
         <p:nvSpPr>
@@ -7985,6 +8281,10 @@
             <a:prstDash val="solid"/>
           </a:ln>
         </p:spPr>
+        <p:txBody>
+          <a:bodyPr/>
+          <a:p/>
+        </p:txBody>
       </p:sp>
       <p:sp>
         <p:nvSpPr>
@@ -8012,6 +8312,10 @@
             <a:prstDash val="solid"/>
           </a:ln>
         </p:spPr>
+        <p:txBody>
+          <a:bodyPr/>
+          <a:p/>
+        </p:txBody>
       </p:sp>
       <p:sp>
         <p:nvSpPr>
@@ -8188,6 +8492,10 @@
             <a:prstDash val="solid"/>
           </a:ln>
         </p:spPr>
+        <p:txBody>
+          <a:bodyPr/>
+          <a:p/>
+        </p:txBody>
       </p:sp>
       <p:sp>
         <p:nvSpPr>
@@ -8252,6 +8560,10 @@
             <a:prstDash val="solid"/>
           </a:ln>
         </p:spPr>
+        <p:txBody>
+          <a:bodyPr/>
+          <a:p/>
+        </p:txBody>
       </p:sp>
       <p:sp>
         <p:nvSpPr>
@@ -8277,6 +8589,10 @@
             <a:prstDash val="solid"/>
           </a:ln>
         </p:spPr>
+        <p:txBody>
+          <a:bodyPr/>
+          <a:p/>
+        </p:txBody>
       </p:sp>
       <p:sp>
         <p:nvSpPr>
@@ -8341,6 +8657,10 @@
             <a:prstDash val="solid"/>
           </a:ln>
         </p:spPr>
+        <p:txBody>
+          <a:bodyPr/>
+          <a:p/>
+        </p:txBody>
       </p:sp>
       <p:sp>
         <p:nvSpPr>
@@ -8366,6 +8686,10 @@
             <a:prstDash val="solid"/>
           </a:ln>
         </p:spPr>
+        <p:txBody>
+          <a:bodyPr/>
+          <a:p/>
+        </p:txBody>
       </p:sp>
       <p:sp>
         <p:nvSpPr>
@@ -8501,6 +8825,10 @@
             <a:prstDash val="solid"/>
           </a:ln>
         </p:spPr>
+        <p:txBody>
+          <a:bodyPr/>
+          <a:p/>
+        </p:txBody>
       </p:sp>
       <p:sp>
         <p:nvSpPr>
@@ -8526,6 +8854,10 @@
             <a:prstDash val="solid"/>
           </a:ln>
         </p:spPr>
+        <p:txBody>
+          <a:bodyPr/>
+          <a:p/>
+        </p:txBody>
       </p:sp>
       <p:sp>
         <p:nvSpPr>
@@ -8599,7 +8931,7 @@
                 <a:ea typeface="Microsoft YaHei" pitchFamily="34" charset="-122"/>
                 <a:cs typeface="Microsoft YaHei" pitchFamily="34" charset="-120"/>
               </a:rPr>
-              <a:t>Cold Heading Die Change: 60min → &lt;10min</a:t>
+              <a:t>Machining Die Change: 60min → &lt;10min</a:t>
             </a:r>
             <a:endParaRPr lang="en-US" sz="1400" dirty="0"/>
           </a:p>
@@ -8629,6 +8961,10 @@
             <a:prstDash val="solid"/>
           </a:ln>
         </p:spPr>
+        <p:txBody>
+          <a:bodyPr/>
+          <a:p/>
+        </p:txBody>
       </p:sp>
       <p:sp>
         <p:nvSpPr>
@@ -8695,6 +9031,10 @@
             <a:prstDash val="solid"/>
           </a:ln>
         </p:spPr>
+        <p:txBody>
+          <a:bodyPr/>
+          <a:p/>
+        </p:txBody>
       </p:sp>
       <p:sp>
         <p:nvSpPr>
@@ -8729,7 +9069,7 @@
                 <a:ea typeface="Microsoft YaHei" pitchFamily="34" charset="-122"/>
                 <a:cs typeface="Microsoft YaHei" pitchFamily="34" charset="-120"/>
               </a:rPr>
-              <a:t>冷镦模换模改善实例</a:t>
+              <a:t>机加工模换模改善实例</a:t>
             </a:r>
             <a:endParaRPr lang="en-US" sz="1200" dirty="0"/>
           </a:p>
@@ -8759,6 +9099,10 @@
             <a:prstDash val="solid"/>
           </a:ln>
         </p:spPr>
+        <p:txBody>
+          <a:bodyPr/>
+          <a:p/>
+        </p:txBody>
       </p:sp>
       <p:sp>
         <p:nvSpPr>
@@ -8823,6 +9167,10 @@
             <a:prstDash val="solid"/>
           </a:ln>
         </p:spPr>
+        <p:txBody>
+          <a:bodyPr/>
+          <a:p/>
+        </p:txBody>
       </p:sp>
       <p:sp>
         <p:nvSpPr>
@@ -8887,6 +9235,10 @@
             <a:prstDash val="solid"/>
           </a:ln>
         </p:spPr>
+        <p:txBody>
+          <a:bodyPr/>
+          <a:p/>
+        </p:txBody>
       </p:sp>
       <p:sp>
         <p:nvSpPr>
@@ -9029,6 +9381,10 @@
             <a:prstDash val="solid"/>
           </a:ln>
         </p:spPr>
+        <p:txBody>
+          <a:bodyPr/>
+          <a:p/>
+        </p:txBody>
       </p:sp>
       <p:sp>
         <p:nvSpPr>
@@ -9171,6 +9527,10 @@
             <a:prstDash val="solid"/>
           </a:ln>
         </p:spPr>
+        <p:txBody>
+          <a:bodyPr/>
+          <a:p/>
+        </p:txBody>
       </p:sp>
       <p:sp>
         <p:nvSpPr>
@@ -9313,6 +9673,10 @@
             <a:prstDash val="solid"/>
           </a:ln>
         </p:spPr>
+        <p:txBody>
+          <a:bodyPr/>
+          <a:p/>
+        </p:txBody>
       </p:sp>
       <p:sp>
         <p:nvSpPr>
@@ -9455,6 +9819,10 @@
             <a:prstDash val="solid"/>
           </a:ln>
         </p:spPr>
+        <p:txBody>
+          <a:bodyPr/>
+          <a:p/>
+        </p:txBody>
       </p:sp>
       <p:sp>
         <p:nvSpPr>
@@ -9597,6 +9965,10 @@
             <a:prstDash val="solid"/>
           </a:ln>
         </p:spPr>
+        <p:txBody>
+          <a:bodyPr/>
+          <a:p/>
+        </p:txBody>
       </p:sp>
       <p:sp>
         <p:nvSpPr>
@@ -9739,6 +10111,10 @@
             <a:prstDash val="solid"/>
           </a:ln>
         </p:spPr>
+        <p:txBody>
+          <a:bodyPr/>
+          <a:p/>
+        </p:txBody>
       </p:sp>
       <p:sp>
         <p:nvSpPr>
@@ -9881,6 +10257,10 @@
             <a:prstDash val="solid"/>
           </a:ln>
         </p:spPr>
+        <p:txBody>
+          <a:bodyPr/>
+          <a:p/>
+        </p:txBody>
       </p:sp>
       <p:sp>
         <p:nvSpPr>
@@ -10023,6 +10403,10 @@
             <a:prstDash val="solid"/>
           </a:ln>
         </p:spPr>
+        <p:txBody>
+          <a:bodyPr/>
+          <a:p/>
+        </p:txBody>
       </p:sp>
       <p:sp>
         <p:nvSpPr>
@@ -10165,6 +10549,10 @@
             <a:prstDash val="solid"/>
           </a:ln>
         </p:spPr>
+        <p:txBody>
+          <a:bodyPr/>
+          <a:p/>
+        </p:txBody>
       </p:sp>
       <p:sp>
         <p:nvSpPr>
@@ -10309,6 +10697,10 @@
             <a:prstDash val="solid"/>
           </a:ln>
         </p:spPr>
+        <p:txBody>
+          <a:bodyPr/>
+          <a:p/>
+        </p:txBody>
       </p:sp>
       <p:sp>
         <p:nvSpPr>
@@ -10405,6 +10797,10 @@
             <a:prstDash val="solid"/>
           </a:ln>
         </p:spPr>
+        <p:txBody>
+          <a:bodyPr/>
+          <a:p/>
+        </p:txBody>
       </p:sp>
       <p:sp>
         <p:nvSpPr>
@@ -10430,6 +10826,10 @@
             <a:prstDash val="solid"/>
           </a:ln>
         </p:spPr>
+        <p:txBody>
+          <a:bodyPr/>
+          <a:p/>
+        </p:txBody>
       </p:sp>
       <p:sp>
         <p:nvSpPr>
@@ -10533,6 +10933,10 @@
             <a:prstDash val="solid"/>
           </a:ln>
         </p:spPr>
+        <p:txBody>
+          <a:bodyPr/>
+          <a:p/>
+        </p:txBody>
       </p:sp>
       <p:sp>
         <p:nvSpPr>
@@ -10599,6 +11003,10 @@
             <a:prstDash val="solid"/>
           </a:ln>
         </p:spPr>
+        <p:txBody>
+          <a:bodyPr/>
+          <a:p/>
+        </p:txBody>
       </p:sp>
       <p:sp>
         <p:nvSpPr>
@@ -10665,6 +11073,10 @@
             <a:prstDash val="solid"/>
           </a:ln>
         </p:spPr>
+        <p:txBody>
+          <a:bodyPr/>
+          <a:p/>
+        </p:txBody>
       </p:sp>
       <p:sp>
         <p:nvSpPr>
@@ -10770,6 +11182,10 @@
             <a:prstDash val="solid"/>
           </a:ln>
         </p:spPr>
+        <p:txBody>
+          <a:bodyPr/>
+          <a:p/>
+        </p:txBody>
       </p:sp>
       <p:sp>
         <p:nvSpPr>
@@ -10875,6 +11291,10 @@
             <a:prstDash val="solid"/>
           </a:ln>
         </p:spPr>
+        <p:txBody>
+          <a:bodyPr/>
+          <a:p/>
+        </p:txBody>
       </p:sp>
       <p:sp>
         <p:nvSpPr>
@@ -10980,6 +11400,10 @@
             <a:prstDash val="solid"/>
           </a:ln>
         </p:spPr>
+        <p:txBody>
+          <a:bodyPr/>
+          <a:p/>
+        </p:txBody>
       </p:sp>
       <p:sp>
         <p:nvSpPr>
@@ -11083,6 +11507,10 @@
             <a:prstDash val="solid"/>
           </a:ln>
         </p:spPr>
+        <p:txBody>
+          <a:bodyPr/>
+          <a:p/>
+        </p:txBody>
       </p:sp>
       <p:sp>
         <p:nvSpPr>
@@ -11264,6 +11692,10 @@
             <a:prstDash val="solid"/>
           </a:ln>
         </p:spPr>
+        <p:txBody>
+          <a:bodyPr/>
+          <a:p/>
+        </p:txBody>
       </p:sp>
       <p:sp>
         <p:nvSpPr>
@@ -11445,6 +11877,10 @@
             <a:prstDash val="solid"/>
           </a:ln>
         </p:spPr>
+        <p:txBody>
+          <a:bodyPr/>
+          <a:p/>
+        </p:txBody>
       </p:sp>
       <p:sp>
         <p:nvSpPr>
@@ -11626,6 +12062,10 @@
             <a:prstDash val="solid"/>
           </a:ln>
         </p:spPr>
+        <p:txBody>
+          <a:bodyPr/>
+          <a:p/>
+        </p:txBody>
       </p:sp>
       <p:sp>
         <p:nvSpPr>
@@ -11807,6 +12247,10 @@
             <a:prstDash val="solid"/>
           </a:ln>
         </p:spPr>
+        <p:txBody>
+          <a:bodyPr/>
+          <a:p/>
+        </p:txBody>
       </p:sp>
       <p:sp>
         <p:nvSpPr>
@@ -11988,6 +12432,10 @@
             <a:prstDash val="solid"/>
           </a:ln>
         </p:spPr>
+        <p:txBody>
+          <a:bodyPr/>
+          <a:p/>
+        </p:txBody>
       </p:sp>
       <p:sp>
         <p:nvSpPr>
@@ -12210,6 +12658,10 @@
             <a:prstDash val="solid"/>
           </a:ln>
         </p:spPr>
+        <p:txBody>
+          <a:bodyPr/>
+          <a:p/>
+        </p:txBody>
       </p:sp>
       <p:sp>
         <p:nvSpPr>
@@ -12276,6 +12728,10 @@
             <a:prstDash val="solid"/>
           </a:ln>
         </p:spPr>
+        <p:txBody>
+          <a:bodyPr/>
+          <a:p/>
+        </p:txBody>
       </p:sp>
       <p:sp>
         <p:nvSpPr>
@@ -12342,6 +12798,10 @@
             <a:prstDash val="solid"/>
           </a:ln>
         </p:spPr>
+        <p:txBody>
+          <a:bodyPr/>
+          <a:p/>
+        </p:txBody>
       </p:sp>
       <p:sp>
         <p:nvSpPr>
@@ -12408,6 +12868,10 @@
             <a:prstDash val="solid"/>
           </a:ln>
         </p:spPr>
+        <p:txBody>
+          <a:bodyPr/>
+          <a:p/>
+        </p:txBody>
       </p:sp>
       <p:sp>
         <p:nvSpPr>
@@ -12504,6 +12968,10 @@
             <a:prstDash val="solid"/>
           </a:ln>
         </p:spPr>
+        <p:txBody>
+          <a:bodyPr/>
+          <a:p/>
+        </p:txBody>
       </p:sp>
       <p:sp>
         <p:nvSpPr>
@@ -12529,6 +12997,10 @@
             <a:prstDash val="solid"/>
           </a:ln>
         </p:spPr>
+        <p:txBody>
+          <a:bodyPr/>
+          <a:p/>
+        </p:txBody>
       </p:sp>
       <p:sp>
         <p:nvSpPr>
@@ -12632,6 +13104,10 @@
             <a:prstDash val="solid"/>
           </a:ln>
         </p:spPr>
+        <p:txBody>
+          <a:bodyPr/>
+          <a:p/>
+        </p:txBody>
       </p:sp>
       <p:sp>
         <p:nvSpPr>
@@ -12698,6 +13174,10 @@
             <a:prstDash val="solid"/>
           </a:ln>
         </p:spPr>
+        <p:txBody>
+          <a:bodyPr/>
+          <a:p/>
+        </p:txBody>
       </p:sp>
       <p:sp>
         <p:nvSpPr>
@@ -12762,6 +13242,10 @@
             <a:prstDash val="solid"/>
           </a:ln>
         </p:spPr>
+        <p:txBody>
+          <a:bodyPr/>
+          <a:p/>
+        </p:txBody>
       </p:sp>
       <p:sp>
         <p:nvSpPr>
@@ -12787,6 +13271,10 @@
             <a:prstDash val="solid"/>
           </a:ln>
         </p:spPr>
+        <p:txBody>
+          <a:bodyPr/>
+          <a:p/>
+        </p:txBody>
       </p:sp>
       <p:sp>
         <p:nvSpPr>
@@ -12812,6 +13300,10 @@
             <a:prstDash val="solid"/>
           </a:ln>
         </p:spPr>
+        <p:txBody>
+          <a:bodyPr/>
+          <a:p/>
+        </p:txBody>
       </p:sp>
       <p:sp>
         <p:nvSpPr>
@@ -13071,6 +13563,10 @@
             <a:prstDash val="solid"/>
           </a:ln>
         </p:spPr>
+        <p:txBody>
+          <a:bodyPr/>
+          <a:p/>
+        </p:txBody>
       </p:sp>
       <p:sp>
         <p:nvSpPr>
@@ -13096,6 +13592,10 @@
             <a:prstDash val="solid"/>
           </a:ln>
         </p:spPr>
+        <p:txBody>
+          <a:bodyPr/>
+          <a:p/>
+        </p:txBody>
       </p:sp>
       <p:sp>
         <p:nvSpPr>
@@ -13121,6 +13621,10 @@
             <a:prstDash val="solid"/>
           </a:ln>
         </p:spPr>
+        <p:txBody>
+          <a:bodyPr/>
+          <a:p/>
+        </p:txBody>
       </p:sp>
       <p:sp>
         <p:nvSpPr>
@@ -13421,6 +13925,10 @@
             <a:prstDash val="solid"/>
           </a:ln>
         </p:spPr>
+        <p:txBody>
+          <a:bodyPr/>
+          <a:p/>
+        </p:txBody>
       </p:sp>
       <p:sp>
         <p:nvSpPr>
@@ -13485,6 +13993,10 @@
             <a:prstDash val="solid"/>
           </a:ln>
         </p:spPr>
+        <p:txBody>
+          <a:bodyPr/>
+          <a:p/>
+        </p:txBody>
       </p:sp>
       <p:sp>
         <p:nvSpPr>
@@ -13512,6 +14024,10 @@
             <a:prstDash val="solid"/>
           </a:ln>
         </p:spPr>
+        <p:txBody>
+          <a:bodyPr/>
+          <a:p/>
+        </p:txBody>
       </p:sp>
       <p:sp>
         <p:nvSpPr>
@@ -13576,6 +14092,10 @@
             <a:prstDash val="solid"/>
           </a:ln>
         </p:spPr>
+        <p:txBody>
+          <a:bodyPr/>
+          <a:p/>
+        </p:txBody>
       </p:sp>
       <p:sp>
         <p:nvSpPr>
@@ -13603,6 +14123,10 @@
             <a:prstDash val="solid"/>
           </a:ln>
         </p:spPr>
+        <p:txBody>
+          <a:bodyPr/>
+          <a:p/>
+        </p:txBody>
       </p:sp>
       <p:sp>
         <p:nvSpPr>
@@ -13667,6 +14191,10 @@
             <a:prstDash val="solid"/>
           </a:ln>
         </p:spPr>
+        <p:txBody>
+          <a:bodyPr/>
+          <a:p/>
+        </p:txBody>
       </p:sp>
       <p:sp>
         <p:nvSpPr>
@@ -13694,6 +14222,10 @@
             <a:prstDash val="solid"/>
           </a:ln>
         </p:spPr>
+        <p:txBody>
+          <a:bodyPr/>
+          <a:p/>
+        </p:txBody>
       </p:sp>
       <p:sp>
         <p:nvSpPr>
@@ -13758,6 +14290,10 @@
             <a:prstDash val="solid"/>
           </a:ln>
         </p:spPr>
+        <p:txBody>
+          <a:bodyPr/>
+          <a:p/>
+        </p:txBody>
       </p:sp>
       <p:sp>
         <p:nvSpPr>
@@ -13785,6 +14321,10 @@
             <a:prstDash val="solid"/>
           </a:ln>
         </p:spPr>
+        <p:txBody>
+          <a:bodyPr/>
+          <a:p/>
+        </p:txBody>
       </p:sp>
       <p:sp>
         <p:nvSpPr>
@@ -13849,6 +14389,10 @@
             <a:prstDash val="solid"/>
           </a:ln>
         </p:spPr>
+        <p:txBody>
+          <a:bodyPr/>
+          <a:p/>
+        </p:txBody>
       </p:sp>
       <p:sp>
         <p:nvSpPr>
